--- a/Explainable_Interpretable.pptx
+++ b/Explainable_Interpretable.pptx
@@ -15642,7 +15642,7 @@
         <p:spPr>
           <a:xfrm>
             <a:off x="144946" y="974863"/>
-            <a:ext cx="8579954" cy="3754874"/>
+            <a:ext cx="8579954" cy="1569660"/>
           </a:xfrm>
           <a:prstGeom prst="rect">
             <a:avLst/>
@@ -15668,7 +15668,7 @@
           </a:p>
           <a:p>
             <a:r>
-              <a:rPr lang="en-US" dirty="0"/>
+              <a:rPr lang="en-US" sz="1000" dirty="0"/>
               <a:t>- </a:t>
             </a:r>
             <a:r>
@@ -15684,17 +15684,17 @@
           </a:p>
           <a:p>
             <a:r>
-              <a:rPr lang="en-US" dirty="0"/>
+              <a:rPr lang="en-US" sz="1000" dirty="0"/>
               <a:t>- </a:t>
             </a:r>
             <a:r>
-              <a:rPr lang="en-US" dirty="0">
+              <a:rPr lang="en-US" sz="1000" dirty="0">
                 <a:hlinkClick r:id="rId4"/>
               </a:rPr>
               <a:t>https://medium.com/swlh/explainable-vs-interpretable-ai-an-intuitive-example-6baf8fc6d402</a:t>
             </a:r>
             <a:r>
-              <a:rPr lang="en-US" dirty="0"/>
+              <a:rPr lang="en-US" sz="1000" dirty="0"/>
               <a:t> </a:t>
             </a:r>
           </a:p>
@@ -15709,121 +15709,35 @@
           </a:p>
           <a:p>
             <a:r>
-              <a:rPr lang="en-US" dirty="0"/>
+              <a:rPr lang="en-US" sz="1000" dirty="0"/>
               <a:t>- </a:t>
             </a:r>
             <a:r>
-              <a:rPr lang="en-US" dirty="0">
+              <a:rPr lang="en-US" sz="1000" dirty="0">
                 <a:hlinkClick r:id="rId5"/>
               </a:rPr>
               <a:t>https://christophm.github.io/interpretable-ml-book/</a:t>
             </a:r>
             <a:r>
-              <a:rPr lang="en-US" dirty="0"/>
+              <a:rPr lang="en-US" sz="1000" dirty="0"/>
               <a:t> </a:t>
             </a:r>
           </a:p>
           <a:p>
             <a:r>
-              <a:rPr lang="en-US" dirty="0"/>
+              <a:rPr lang="en-US" sz="1000" dirty="0"/>
               <a:t>- </a:t>
             </a:r>
             <a:r>
-              <a:rPr lang="en-US" dirty="0">
+              <a:rPr lang="en-US" sz="1000" dirty="0">
                 <a:hlinkClick r:id="rId6"/>
               </a:rPr>
               <a:t>https://www.youtube.com/watch?v=hRR0ORnjCgU</a:t>
             </a:r>
             <a:r>
-              <a:rPr lang="en-US" dirty="0"/>
+              <a:rPr lang="en-US" sz="1000" dirty="0"/>
               <a:t> </a:t>
             </a:r>
-          </a:p>
-          <a:p>
-            <a:r>
-              <a:rPr lang="en-US" dirty="0"/>
-              <a:t> </a:t>
-            </a:r>
-          </a:p>
-          <a:p>
-            <a:r>
-              <a:rPr lang="en-US" dirty="0"/>
-              <a:t>LIME Framework</a:t>
-            </a:r>
-          </a:p>
-          <a:p>
-            <a:r>
-              <a:rPr lang="en-US" dirty="0"/>
-              <a:t>Interpretable Machine Learning Using LIME Framework - Kasia </a:t>
-            </a:r>
-            <a:r>
-              <a:rPr lang="en-US" dirty="0" err="1"/>
-              <a:t>Kulma</a:t>
-            </a:r>
-            <a:r>
-              <a:rPr lang="en-US" dirty="0"/>
-              <a:t> (PhD), Data Scientist, Aviva - 2017</a:t>
-            </a:r>
-          </a:p>
-          <a:p>
-            <a:r>
-              <a:rPr lang="en-US" dirty="0"/>
-              <a:t>- </a:t>
-            </a:r>
-            <a:r>
-              <a:rPr lang="en-US" dirty="0">
-                <a:hlinkClick r:id="rId7"/>
-              </a:rPr>
-              <a:t>https://www.youtube.com/watch?v=CY3t11vuuOM</a:t>
-            </a:r>
-            <a:r>
-              <a:rPr lang="en-US" dirty="0"/>
-              <a:t> </a:t>
-            </a:r>
-          </a:p>
-          <a:p>
-            <a:endParaRPr lang="en-US" dirty="0"/>
-          </a:p>
-          <a:p>
-            <a:r>
-              <a:rPr lang="en-US" dirty="0"/>
-              <a:t>Please Stop Doing "Explainable" ML - Cynthia Rudin, 2019</a:t>
-            </a:r>
-          </a:p>
-          <a:p>
-            <a:r>
-              <a:rPr lang="en-US" dirty="0"/>
-              <a:t>- </a:t>
-            </a:r>
-            <a:r>
-              <a:rPr lang="en-US" dirty="0">
-                <a:hlinkClick r:id="rId8"/>
-              </a:rPr>
-              <a:t>https://www.youtube.com/watch?v=I0yrJz8uc5Q</a:t>
-            </a:r>
-            <a:r>
-              <a:rPr lang="en-US" dirty="0"/>
-              <a:t> </a:t>
-            </a:r>
-          </a:p>
-          <a:p>
-            <a:r>
-              <a:rPr lang="en-US" dirty="0"/>
-              <a:t>- </a:t>
-            </a:r>
-            <a:r>
-              <a:rPr lang="en-US" dirty="0">
-                <a:hlinkClick r:id="rId9"/>
-              </a:rPr>
-              <a:t>https://www.nature.com/articles/s42256-019-0048-x</a:t>
-            </a:r>
-            <a:r>
-              <a:rPr lang="en-US" dirty="0"/>
-              <a:t> </a:t>
-            </a:r>
-          </a:p>
-          <a:p>
-            <a:endParaRPr lang="en-US" dirty="0"/>
           </a:p>
         </p:txBody>
       </p:sp>
@@ -15842,7 +15756,7 @@
           <p:nvPr/>
         </p:nvPicPr>
         <p:blipFill rotWithShape="1">
-          <a:blip r:embed="rId10" cstate="email">
+          <a:blip r:embed="rId7" cstate="email">
             <a:extLst>
               <a:ext uri="{28A0092B-C50C-407E-A947-70E740481C1C}">
                 <a14:useLocalDpi xmlns:a14="http://schemas.microsoft.com/office/drawing/2010/main"/>
@@ -15877,7 +15791,7 @@
           <p:nvPr/>
         </p:nvPicPr>
         <p:blipFill>
-          <a:blip r:embed="rId11" cstate="email">
+          <a:blip r:embed="rId8" cstate="email">
             <a:extLst>
               <a:ext uri="{28A0092B-C50C-407E-A947-70E740481C1C}">
                 <a14:useLocalDpi xmlns:a14="http://schemas.microsoft.com/office/drawing/2010/main"/>
@@ -15890,14 +15804,212 @@
         </p:blipFill>
         <p:spPr>
           <a:xfrm>
-            <a:off x="9599468" y="3465978"/>
-            <a:ext cx="2459182" cy="3182471"/>
+            <a:off x="5136073" y="2110866"/>
+            <a:ext cx="1399717" cy="1811399"/>
           </a:xfrm>
           <a:prstGeom prst="rect">
             <a:avLst/>
           </a:prstGeom>
         </p:spPr>
       </p:pic>
+      <p:sp>
+        <p:nvSpPr>
+          <p:cNvPr id="6" name="TextBox 5">
+            <a:extLst>
+              <a:ext uri="{FF2B5EF4-FFF2-40B4-BE49-F238E27FC236}">
+                <a16:creationId xmlns:a16="http://schemas.microsoft.com/office/drawing/2014/main" id="{50DA3587-4538-9141-9DDE-414E431FC079}"/>
+              </a:ext>
+            </a:extLst>
+          </p:cNvPr>
+          <p:cNvSpPr txBox="1"/>
+          <p:nvPr/>
+        </p:nvSpPr>
+        <p:spPr>
+          <a:xfrm>
+            <a:off x="144946" y="4324350"/>
+            <a:ext cx="4870807" cy="1631216"/>
+          </a:xfrm>
+          <a:prstGeom prst="rect">
+            <a:avLst/>
+          </a:prstGeom>
+          <a:noFill/>
+        </p:spPr>
+        <p:txBody>
+          <a:bodyPr wrap="square" rtlCol="0">
+            <a:spAutoFit/>
+          </a:bodyPr>
+          <a:lstStyle/>
+          <a:p>
+            <a:r>
+              <a:rPr lang="en-US" dirty="0"/>
+              <a:t>LIME Framework</a:t>
+            </a:r>
+          </a:p>
+          <a:p>
+            <a:r>
+              <a:rPr lang="en-US" dirty="0"/>
+              <a:t>Interpretable Machine Learning Using LIME Framework </a:t>
+            </a:r>
+            <a:br>
+              <a:rPr lang="en-US" dirty="0"/>
+            </a:br>
+            <a:r>
+              <a:rPr lang="en-US" dirty="0"/>
+              <a:t>by Kasia </a:t>
+            </a:r>
+            <a:r>
+              <a:rPr lang="en-US" dirty="0" err="1"/>
+              <a:t>Kulma</a:t>
+            </a:r>
+            <a:r>
+              <a:rPr lang="en-US" dirty="0"/>
+              <a:t> (PhD), Data Scientist, Aviva - 2017</a:t>
+            </a:r>
+          </a:p>
+          <a:p>
+            <a:r>
+              <a:rPr lang="en-US" sz="1000" dirty="0"/>
+              <a:t>- </a:t>
+            </a:r>
+            <a:r>
+              <a:rPr lang="en-US" sz="1000" dirty="0">
+                <a:hlinkClick r:id="rId9"/>
+              </a:rPr>
+              <a:t>https://www.youtube.com/watch?v=CY3t11vuuOM</a:t>
+            </a:r>
+            <a:r>
+              <a:rPr lang="en-US" sz="1000" dirty="0"/>
+              <a:t> </a:t>
+            </a:r>
+          </a:p>
+          <a:p>
+            <a:endParaRPr lang="en-US" dirty="0"/>
+          </a:p>
+          <a:p>
+            <a:r>
+              <a:rPr lang="en-US" dirty="0"/>
+              <a:t>Please Stop Doing "Explainable" ML - Cynthia Rudin, 2019</a:t>
+            </a:r>
+          </a:p>
+          <a:p>
+            <a:r>
+              <a:rPr lang="en-US" sz="1000" dirty="0"/>
+              <a:t>- </a:t>
+            </a:r>
+            <a:r>
+              <a:rPr lang="en-US" sz="1000" dirty="0">
+                <a:hlinkClick r:id="rId10"/>
+              </a:rPr>
+              <a:t>https://www.youtube.com/watch?v=I0yrJz8uc5Q</a:t>
+            </a:r>
+            <a:r>
+              <a:rPr lang="en-US" sz="1000" dirty="0"/>
+              <a:t> </a:t>
+            </a:r>
+          </a:p>
+          <a:p>
+            <a:r>
+              <a:rPr lang="en-US" sz="1000" dirty="0"/>
+              <a:t>- </a:t>
+            </a:r>
+            <a:r>
+              <a:rPr lang="en-US" sz="1000" dirty="0">
+                <a:hlinkClick r:id="rId11"/>
+              </a:rPr>
+              <a:t>https://www.nature.com/articles/s42256-019-0048-x</a:t>
+            </a:r>
+            <a:r>
+              <a:rPr lang="en-US" sz="1000" dirty="0"/>
+              <a:t> </a:t>
+            </a:r>
+          </a:p>
+        </p:txBody>
+      </p:sp>
+      <p:sp>
+        <p:nvSpPr>
+          <p:cNvPr id="7" name="TextBox 6">
+            <a:extLst>
+              <a:ext uri="{FF2B5EF4-FFF2-40B4-BE49-F238E27FC236}">
+                <a16:creationId xmlns:a16="http://schemas.microsoft.com/office/drawing/2014/main" id="{743F735E-5FE0-324E-A2D7-739BDA6AB000}"/>
+              </a:ext>
+            </a:extLst>
+          </p:cNvPr>
+          <p:cNvSpPr txBox="1"/>
+          <p:nvPr/>
+        </p:nvSpPr>
+        <p:spPr>
+          <a:xfrm>
+            <a:off x="5827059" y="5232291"/>
+            <a:ext cx="5795682" cy="1384995"/>
+          </a:xfrm>
+          <a:prstGeom prst="rect">
+            <a:avLst/>
+          </a:prstGeom>
+          <a:noFill/>
+        </p:spPr>
+        <p:txBody>
+          <a:bodyPr wrap="square" rtlCol="0">
+            <a:spAutoFit/>
+          </a:bodyPr>
+          <a:lstStyle/>
+          <a:p>
+            <a:r>
+              <a:rPr lang="en-US" dirty="0"/>
+              <a:t>People Love Black Boxes (Cynthia Rudin, 2019) :</a:t>
+            </a:r>
+          </a:p>
+          <a:p>
+            <a:pPr marL="285750" indent="-285750">
+              <a:buFont typeface="Arial" panose="020B0604020202020204" pitchFamily="34" charset="0"/>
+              <a:buChar char="•"/>
+            </a:pPr>
+            <a:r>
+              <a:rPr lang="en-US" dirty="0"/>
+              <a:t>they allow companies to make $$</a:t>
+            </a:r>
+          </a:p>
+          <a:p>
+            <a:pPr marL="285750" indent="-285750">
+              <a:buFont typeface="Arial" panose="020B0604020202020204" pitchFamily="34" charset="0"/>
+              <a:buChar char="•"/>
+            </a:pPr>
+            <a:r>
+              <a:rPr lang="en-US" dirty="0"/>
+              <a:t>they are "magical" and "uncover things"</a:t>
+            </a:r>
+          </a:p>
+          <a:p>
+            <a:pPr marL="285750" indent="-285750">
+              <a:buFont typeface="Arial" panose="020B0604020202020204" pitchFamily="34" charset="0"/>
+              <a:buChar char="•"/>
+            </a:pPr>
+            <a:r>
+              <a:rPr lang="en-US" dirty="0"/>
+              <a:t>they are easy to train, an excuse not to do any feature engineering</a:t>
+            </a:r>
+          </a:p>
+          <a:p>
+            <a:pPr marL="285750" indent="-285750">
+              <a:buFont typeface="Arial" panose="020B0604020202020204" pitchFamily="34" charset="0"/>
+              <a:buChar char="•"/>
+            </a:pPr>
+            <a:r>
+              <a:rPr lang="en-US" dirty="0"/>
+              <a:t>people think they are more accurate</a:t>
+            </a:r>
+          </a:p>
+          <a:p>
+            <a:pPr marL="285750" indent="-285750">
+              <a:buFont typeface="Arial" panose="020B0604020202020204" pitchFamily="34" charset="0"/>
+              <a:buChar char="•"/>
+            </a:pPr>
+            <a:r>
+              <a:rPr lang="en-US" dirty="0"/>
+              <a:t>we don't even teach interpretable ML</a:t>
+            </a:r>
+          </a:p>
+        </p:txBody>
+      </p:sp>
     </p:spTree>
   </p:cSld>
   <p:clrMapOvr>
